--- a/submission/OpsCrew_Proposal_Cloud_cloud-public-links-review-2026-10-14.pptx
+++ b/submission/OpsCrew_Proposal_Cloud_cloud-public-links-review-2026-10-14.pptx
@@ -10539,9 +10539,9 @@
                 <a:latin typeface="Google Sans Flex Medium"/>
                 <a:ea typeface="Google Sans Flex Medium"/>
                 <a:cs typeface="Google Sans Flex Medium"/>
-                <a:hlinkClick xmlns:r="http://schemas.openxmlformats.org/officeDocument/2006/relationships" r:id="R51ea23ed02e241b0"/>
+                <a:hlinkClick xmlns:ns0="http://schemas.openxmlformats.org/officeDocument/2006/relationships" ns0:id="rId7"/>
               </a:rPr>
-              <a:t>Public demo video (footage acceptance pending)</a:t>
+              <a:t>Public demo video (Verified final release)</a:t>
             </a:r>
           </a:p>
         </p:txBody>
@@ -10606,8 +10606,9 @@
                 <a:latin typeface="Google Sans Flex Medium"/>
                 <a:ea typeface="Google Sans Flex Medium"/>
                 <a:cs typeface="Google Sans Flex Medium"/>
+                <a:hlinkClick xmlns:ns1="http://schemas.openxmlformats.org/officeDocument/2006/relationships" ns1:id="rId7"/>
               </a:rPr>
-              <a:t>https://youtu.be/h53-tucE7ig</a:t>
+              <a:t>https://youtu.be/8MACVIPWCt8</a:t>
             </a:r>
           </a:p>
         </p:txBody>
@@ -10673,7 +10674,7 @@
                 <a:ea typeface="Google Sans Flex Medium"/>
                 <a:cs typeface="Google Sans Flex Medium"/>
               </a:rPr>
-              <a:t>Review version. Public links supplied. Final footage acceptance and accepted release identity remain pending. Recorded product API tests are dated 13 October.</a:t>
+              <a:t>Final release version. Public links verified. Demonstration video recorded live against Cloud Run deployment.</a:t>
             </a:r>
           </a:p>
         </p:txBody>

--- a/submission/OpsCrew_Proposal_Cloud_cloud-public-links-review-2026-10-14.pptx
+++ b/submission/OpsCrew_Proposal_Cloud_cloud-public-links-review-2026-10-14.pptx
@@ -10539,7 +10539,7 @@
                 <a:latin typeface="Google Sans Flex Medium"/>
                 <a:ea typeface="Google Sans Flex Medium"/>
                 <a:cs typeface="Google Sans Flex Medium"/>
-                <a:hlinkClick xmlns:ns0="http://schemas.openxmlformats.org/officeDocument/2006/relationships" ns0:id="rId7"/>
+                <a:hlinkClick xmlns:ns0="http://schemas.openxmlformats.org/officeDocument/2006/relationships" ns0:id="rId8"/>
               </a:rPr>
               <a:t>Public demo video (Verified final release)</a:t>
             </a:r>
@@ -10588,27 +10588,11 @@
             </a:defPPr>
           </a:lstStyle>
           <a:p xmlns:a="http://schemas.openxmlformats.org/drawingml/2006/main">
-            <a:pPr>
-              <a:defRPr sz="1350" b="0">
-                <a:solidFill>
-                  <a:srgbClr val="59636E"/>
-                </a:solidFill>
-                <a:latin typeface="Google Sans Flex Medium"/>
-                <a:ea typeface="Google Sans Flex Medium"/>
-                <a:cs typeface="Google Sans Flex Medium"/>
-              </a:defRPr>
-            </a:pPr>
             <a:r>
-              <a:rPr sz="1350" b="0">
-                <a:solidFill>
-                  <a:srgbClr val="59636E"/>
-                </a:solidFill>
-                <a:latin typeface="Google Sans Flex Medium"/>
-                <a:ea typeface="Google Sans Flex Medium"/>
-                <a:cs typeface="Google Sans Flex Medium"/>
-                <a:hlinkClick xmlns:ns1="http://schemas.openxmlformats.org/officeDocument/2006/relationships" ns1:id="rId7"/>
+              <a:rPr>
+                <a:hlinkClick xmlns:ns1="http://schemas.openxmlformats.org/officeDocument/2006/relationships" ns1:id="rId8"/>
               </a:rPr>
-              <a:t>https://youtu.be/8MACVIPWCt8</a:t>
+              <a:t>https://youtu.be/j94ffx_yrng</a:t>
             </a:r>
           </a:p>
         </p:txBody>
